--- a/dist/weeks-포트폴리오제작/포트폴리오제작_02주차_자기역량분석.pptx
+++ b/dist/weeks-포트폴리오제작/포트폴리오제작_02주차_자기역량분석.pptx
@@ -7520,7 +7520,7 @@
               <a:buNone/>
             </a:pPr>
             <a:r>
-              <a:rPr lang="en-US" sz="1150" dirty="0">
+              <a:rPr lang="en-US" sz="1050" dirty="0">
                 <a:solidFill>
                   <a:srgbClr val="6E6E6E"/>
                 </a:solidFill>
@@ -7530,7 +7530,7 @@
               </a:rPr>
               <a:t>증거가 되는 작업이 있는 것.</a:t>
             </a:r>
-            <a:endParaRPr lang="en-US" sz="1150" dirty="0"/>
+            <a:endParaRPr lang="en-US" sz="1050" dirty="0"/>
           </a:p>
           <a:p>
             <a:pPr indent="0" marL="0">
@@ -7540,7 +7540,7 @@
               <a:buNone/>
             </a:pPr>
             <a:r>
-              <a:rPr lang="en-US" sz="1150" dirty="0">
+              <a:rPr lang="en-US" sz="1050" dirty="0">
                 <a:solidFill>
                   <a:srgbClr val="6E6E6E"/>
                 </a:solidFill>
@@ -7550,7 +7550,7 @@
               </a:rPr>
               <a:t>각 강점 옆에 그것을 보여줄 프로젝트 이름을 적습니다. 짝이 없는 강점은 지웁니다.</a:t>
             </a:r>
-            <a:endParaRPr lang="en-US" sz="1150" dirty="0"/>
+            <a:endParaRPr lang="en-US" sz="1050" dirty="0"/>
           </a:p>
         </p:txBody>
       </p:sp>
@@ -7713,7 +7713,7 @@
               <a:buNone/>
             </a:pPr>
             <a:r>
-              <a:rPr lang="en-US" sz="1150" dirty="0">
+              <a:rPr lang="en-US" sz="1050" dirty="0">
                 <a:solidFill>
                   <a:srgbClr val="6E6E6E"/>
                 </a:solidFill>
@@ -7723,7 +7723,7 @@
               </a:rPr>
               <a:t>지금 증거가 없는 것.</a:t>
             </a:r>
-            <a:endParaRPr lang="en-US" sz="1150" dirty="0"/>
+            <a:endParaRPr lang="en-US" sz="1050" dirty="0"/>
           </a:p>
           <a:p>
             <a:pPr indent="0" marL="0">
@@ -7733,7 +7733,7 @@
               <a:buNone/>
             </a:pPr>
             <a:r>
-              <a:rPr lang="en-US" sz="1150" dirty="0">
+              <a:rPr lang="en-US" sz="1050" dirty="0">
                 <a:solidFill>
                   <a:srgbClr val="6E6E6E"/>
                 </a:solidFill>
@@ -7743,7 +7743,7 @@
               </a:rPr>
               <a:t>숨기는 대신 학기 중에 채울지, 아예 안 다룰지를 정합니다.</a:t>
             </a:r>
-            <a:endParaRPr lang="en-US" sz="1150" dirty="0"/>
+            <a:endParaRPr lang="en-US" sz="1050" dirty="0"/>
           </a:p>
         </p:txBody>
       </p:sp>
@@ -7906,7 +7906,7 @@
               <a:buNone/>
             </a:pPr>
             <a:r>
-              <a:rPr lang="en-US" sz="1150" dirty="0">
+              <a:rPr lang="en-US" sz="1050" dirty="0">
                 <a:solidFill>
                   <a:srgbClr val="6E6E6E"/>
                 </a:solidFill>
@@ -7916,7 +7916,7 @@
               </a:rPr>
               <a:t>목표 직무가 요구하는데 내가 조금이라도 해본 것.</a:t>
             </a:r>
-            <a:endParaRPr lang="en-US" sz="1150" dirty="0"/>
+            <a:endParaRPr lang="en-US" sz="1050" dirty="0"/>
           </a:p>
           <a:p>
             <a:pPr indent="0" marL="0">
@@ -7926,7 +7926,7 @@
               <a:buNone/>
             </a:pPr>
             <a:r>
-              <a:rPr lang="en-US" sz="1150" dirty="0">
+              <a:rPr lang="en-US" sz="1050" dirty="0">
                 <a:solidFill>
                   <a:srgbClr val="6E6E6E"/>
                 </a:solidFill>
@@ -7936,7 +7936,7 @@
               </a:rPr>
               <a:t>여기가 학기 중에 키울 부분입니다.</a:t>
             </a:r>
-            <a:endParaRPr lang="en-US" sz="1150" dirty="0"/>
+            <a:endParaRPr lang="en-US" sz="1050" dirty="0"/>
           </a:p>
         </p:txBody>
       </p:sp>
@@ -8099,7 +8099,7 @@
               <a:buNone/>
             </a:pPr>
             <a:r>
-              <a:rPr lang="en-US" sz="1150" dirty="0">
+              <a:rPr lang="en-US" sz="1050" dirty="0">
                 <a:solidFill>
                   <a:srgbClr val="6E6E6E"/>
                 </a:solidFill>
@@ -8109,7 +8109,7 @@
               </a:rPr>
               <a:t>같은 직무 지원자 대부분이 갖고 있는 것.</a:t>
             </a:r>
-            <a:endParaRPr lang="en-US" sz="1150" dirty="0"/>
+            <a:endParaRPr lang="en-US" sz="1050" dirty="0"/>
           </a:p>
           <a:p>
             <a:pPr indent="0" marL="0">
@@ -8119,7 +8119,7 @@
               <a:buNone/>
             </a:pPr>
             <a:r>
-              <a:rPr lang="en-US" sz="1150" dirty="0">
+              <a:rPr lang="en-US" sz="1050" dirty="0">
                 <a:solidFill>
                   <a:srgbClr val="6E6E6E"/>
                 </a:solidFill>
@@ -8129,7 +8129,7 @@
               </a:rPr>
               <a:t>이걸로는 차별화가 안 되므로 분량을 줄입니다.</a:t>
             </a:r>
-            <a:endParaRPr lang="en-US" sz="1150" dirty="0"/>
+            <a:endParaRPr lang="en-US" sz="1050" dirty="0"/>
           </a:p>
         </p:txBody>
       </p:sp>
@@ -10283,6 +10283,95 @@
             <a:avLst/>
           </a:prstGeom>
           <a:solidFill>
+            <a:srgbClr val="FFFFFF"/>
+          </a:solidFill>
+          <a:ln w="12700">
+            <a:solidFill>
+              <a:srgbClr val="111111"/>
+            </a:solidFill>
+            <a:prstDash val="solid"/>
+          </a:ln>
+        </p:spPr>
+      </p:sp>
+      <p:sp>
+        <p:nvSpPr>
+          <p:cNvPr id="10" name="Shape 8"/>
+          <p:cNvSpPr/>
+          <p:nvPr/>
+        </p:nvSpPr>
+        <p:spPr>
+          <a:xfrm>
+            <a:off x="640080" y="1627632"/>
+            <a:ext cx="5254600" cy="64008"/>
+          </a:xfrm>
+          <a:prstGeom prst="rect">
+            <a:avLst/>
+          </a:prstGeom>
+          <a:solidFill>
+            <a:srgbClr val="111111"/>
+          </a:solidFill>
+          <a:ln w="12700">
+            <a:solidFill>
+              <a:srgbClr val="111111"/>
+            </a:solidFill>
+            <a:prstDash val="solid"/>
+          </a:ln>
+        </p:spPr>
+      </p:sp>
+      <p:sp>
+        <p:nvSpPr>
+          <p:cNvPr id="11" name="Text 9"/>
+          <p:cNvSpPr/>
+          <p:nvPr/>
+        </p:nvSpPr>
+        <p:spPr>
+          <a:xfrm>
+            <a:off x="1042416" y="1901952"/>
+            <a:ext cx="4449928" cy="365760"/>
+          </a:xfrm>
+          <a:prstGeom prst="rect">
+            <a:avLst/>
+          </a:prstGeom>
+          <a:noFill/>
+          <a:ln/>
+        </p:spPr>
+        <p:txBody>
+          <a:bodyPr wrap="square" lIns="0" tIns="0" rIns="0" bIns="0" rtlCol="0" anchor="ctr"/>
+          <a:lstStyle/>
+          <a:p>
+            <a:pPr indent="0" marL="0">
+              <a:buNone/>
+            </a:pPr>
+            <a:r>
+              <a:rPr lang="en-US" sz="1700" dirty="0">
+                <a:solidFill>
+                  <a:srgbClr val="111111"/>
+                </a:solidFill>
+                <a:latin typeface="Pretendard SemiBold" pitchFamily="34" charset="0"/>
+                <a:ea typeface="Pretendard SemiBold" pitchFamily="34" charset="-122"/>
+                <a:cs typeface="Pretendard SemiBold" pitchFamily="34" charset="-120"/>
+              </a:rPr>
+              <a:t>직무에 맞춘 서술</a:t>
+            </a:r>
+            <a:endParaRPr lang="en-US" sz="1700" dirty="0"/>
+          </a:p>
+        </p:txBody>
+      </p:sp>
+      <p:sp>
+        <p:nvSpPr>
+          <p:cNvPr id="12" name="Shape 10"/>
+          <p:cNvSpPr/>
+          <p:nvPr/>
+        </p:nvSpPr>
+        <p:spPr>
+          <a:xfrm>
+            <a:off x="6297016" y="1627632"/>
+            <a:ext cx="5254600" cy="3419856"/>
+          </a:xfrm>
+          <a:prstGeom prst="rect">
+            <a:avLst/>
+          </a:prstGeom>
+          <a:solidFill>
             <a:srgbClr val="F2F2F2"/>
           </a:solidFill>
           <a:ln w="12700">
@@ -10295,13 +10384,13 @@
       </p:sp>
       <p:sp>
         <p:nvSpPr>
-          <p:cNvPr id="10" name="Text 8"/>
-          <p:cNvSpPr/>
-          <p:nvPr/>
-        </p:nvSpPr>
-        <p:spPr>
-          <a:xfrm>
-            <a:off x="1042416" y="1901952"/>
+          <p:cNvPr id="13" name="Text 11"/>
+          <p:cNvSpPr/>
+          <p:nvPr/>
+        </p:nvSpPr>
+        <p:spPr>
+          <a:xfrm>
+            <a:off x="6699352" y="1901952"/>
             <a:ext cx="4449928" cy="365760"/>
           </a:xfrm>
           <a:prstGeom prst="rect">
@@ -10320,13 +10409,13 @@
             <a:r>
               <a:rPr lang="en-US" sz="1700" dirty="0">
                 <a:solidFill>
-                  <a:srgbClr val="111111"/>
+                  <a:srgbClr val="9B9B9B"/>
                 </a:solidFill>
                 <a:latin typeface="Pretendard SemiBold" pitchFamily="34" charset="0"/>
                 <a:ea typeface="Pretendard SemiBold" pitchFamily="34" charset="-122"/>
                 <a:cs typeface="Pretendard SemiBold" pitchFamily="34" charset="-120"/>
               </a:rPr>
-              <a:t>직무에 맞춘 서술</a:t>
+              <a:t>직무와 어긋난 서술</a:t>
             </a:r>
             <a:endParaRPr lang="en-US" sz="1700" dirty="0"/>
           </a:p>
@@ -10334,71 +10423,7 @@
       </p:sp>
       <p:sp>
         <p:nvSpPr>
-          <p:cNvPr id="11" name="Shape 9"/>
-          <p:cNvSpPr/>
-          <p:nvPr/>
-        </p:nvSpPr>
-        <p:spPr>
-          <a:xfrm>
-            <a:off x="6297016" y="1627632"/>
-            <a:ext cx="5254600" cy="3419856"/>
-          </a:xfrm>
-          <a:prstGeom prst="rect">
-            <a:avLst/>
-          </a:prstGeom>
-          <a:solidFill>
-            <a:srgbClr val="FFFFFF"/>
-          </a:solidFill>
-          <a:ln w="12700">
-            <a:solidFill>
-              <a:srgbClr val="DCDCDC"/>
-            </a:solidFill>
-            <a:prstDash val="solid"/>
-          </a:ln>
-        </p:spPr>
-      </p:sp>
-      <p:sp>
-        <p:nvSpPr>
-          <p:cNvPr id="12" name="Text 10"/>
-          <p:cNvSpPr/>
-          <p:nvPr/>
-        </p:nvSpPr>
-        <p:spPr>
-          <a:xfrm>
-            <a:off x="6699352" y="1901952"/>
-            <a:ext cx="4449928" cy="365760"/>
-          </a:xfrm>
-          <a:prstGeom prst="rect">
-            <a:avLst/>
-          </a:prstGeom>
-          <a:noFill/>
-          <a:ln/>
-        </p:spPr>
-        <p:txBody>
-          <a:bodyPr wrap="square" lIns="0" tIns="0" rIns="0" bIns="0" rtlCol="0" anchor="ctr"/>
-          <a:lstStyle/>
-          <a:p>
-            <a:pPr indent="0" marL="0">
-              <a:buNone/>
-            </a:pPr>
-            <a:r>
-              <a:rPr lang="en-US" sz="1700" dirty="0">
-                <a:solidFill>
-                  <a:srgbClr val="9B9B9B"/>
-                </a:solidFill>
-                <a:latin typeface="Pretendard SemiBold" pitchFamily="34" charset="0"/>
-                <a:ea typeface="Pretendard SemiBold" pitchFamily="34" charset="-122"/>
-                <a:cs typeface="Pretendard SemiBold" pitchFamily="34" charset="-120"/>
-              </a:rPr>
-              <a:t>직무와 어긋난 서술</a:t>
-            </a:r>
-            <a:endParaRPr lang="en-US" sz="1700" dirty="0"/>
-          </a:p>
-        </p:txBody>
-      </p:sp>
-      <p:sp>
-        <p:nvSpPr>
-          <p:cNvPr id="13" name="Text 11"/>
+          <p:cNvPr id="14" name="Text 12"/>
           <p:cNvSpPr/>
           <p:nvPr/>
         </p:nvSpPr>
@@ -10437,7 +10462,7 @@
       </p:sp>
       <p:sp>
         <p:nvSpPr>
-          <p:cNvPr id="14" name="Text 12"/>
+          <p:cNvPr id="15" name="Text 13"/>
           <p:cNvSpPr/>
           <p:nvPr/>
         </p:nvSpPr>
@@ -10463,7 +10488,7 @@
               <a:buNone/>
             </a:pPr>
             <a:r>
-              <a:rPr lang="en-US" sz="1150" dirty="0">
+              <a:rPr lang="en-US" sz="1150" b="1" dirty="0">
                 <a:solidFill>
                   <a:srgbClr val="1F1F1F"/>
                 </a:solidFill>
@@ -10479,7 +10504,7 @@
       </p:sp>
       <p:sp>
         <p:nvSpPr>
-          <p:cNvPr id="15" name="Text 13"/>
+          <p:cNvPr id="16" name="Text 14"/>
           <p:cNvSpPr/>
           <p:nvPr/>
         </p:nvSpPr>
@@ -10518,7 +10543,7 @@
       </p:sp>
       <p:sp>
         <p:nvSpPr>
-          <p:cNvPr id="16" name="Text 14"/>
+          <p:cNvPr id="17" name="Text 15"/>
           <p:cNvSpPr/>
           <p:nvPr/>
         </p:nvSpPr>
@@ -10560,7 +10585,7 @@
       </p:sp>
       <p:sp>
         <p:nvSpPr>
-          <p:cNvPr id="17" name="Shape 15"/>
+          <p:cNvPr id="18" name="Shape 16"/>
           <p:cNvSpPr/>
           <p:nvPr/>
         </p:nvSpPr>
@@ -10585,7 +10610,7 @@
       </p:sp>
       <p:sp>
         <p:nvSpPr>
-          <p:cNvPr id="18" name="Shape 16"/>
+          <p:cNvPr id="19" name="Shape 17"/>
           <p:cNvSpPr/>
           <p:nvPr/>
         </p:nvSpPr>
@@ -10610,7 +10635,7 @@
       </p:sp>
       <p:sp>
         <p:nvSpPr>
-          <p:cNvPr id="19" name="Text 17"/>
+          <p:cNvPr id="20" name="Text 18"/>
           <p:cNvSpPr/>
           <p:nvPr/>
         </p:nvSpPr>
@@ -10649,7 +10674,7 @@
       </p:sp>
       <p:sp>
         <p:nvSpPr>
-          <p:cNvPr id="20" name="Text 18"/>
+          <p:cNvPr id="21" name="Text 19"/>
           <p:cNvSpPr/>
           <p:nvPr/>
         </p:nvSpPr>
@@ -10675,7 +10700,7 @@
               <a:buNone/>
             </a:pPr>
             <a:r>
-              <a:rPr lang="en-US" sz="1150" dirty="0">
+              <a:rPr lang="en-US" sz="1150" b="1" dirty="0">
                 <a:solidFill>
                   <a:srgbClr val="1F1F1F"/>
                 </a:solidFill>
@@ -10691,7 +10716,7 @@
       </p:sp>
       <p:sp>
         <p:nvSpPr>
-          <p:cNvPr id="21" name="Text 19"/>
+          <p:cNvPr id="22" name="Text 20"/>
           <p:cNvSpPr/>
           <p:nvPr/>
         </p:nvSpPr>
@@ -10730,7 +10755,7 @@
       </p:sp>
       <p:sp>
         <p:nvSpPr>
-          <p:cNvPr id="22" name="Text 20"/>
+          <p:cNvPr id="23" name="Text 21"/>
           <p:cNvSpPr/>
           <p:nvPr/>
         </p:nvSpPr>
@@ -10772,7 +10797,7 @@
       </p:sp>
       <p:sp>
         <p:nvSpPr>
-          <p:cNvPr id="23" name="Shape 21"/>
+          <p:cNvPr id="24" name="Shape 22"/>
           <p:cNvSpPr/>
           <p:nvPr/>
         </p:nvSpPr>
@@ -10797,7 +10822,7 @@
       </p:sp>
       <p:sp>
         <p:nvSpPr>
-          <p:cNvPr id="24" name="Shape 22"/>
+          <p:cNvPr id="25" name="Shape 23"/>
           <p:cNvSpPr/>
           <p:nvPr/>
         </p:nvSpPr>
@@ -10822,7 +10847,7 @@
       </p:sp>
       <p:sp>
         <p:nvSpPr>
-          <p:cNvPr id="25" name="Text 23"/>
+          <p:cNvPr id="26" name="Text 24"/>
           <p:cNvSpPr/>
           <p:nvPr/>
         </p:nvSpPr>
@@ -10861,7 +10886,7 @@
       </p:sp>
       <p:sp>
         <p:nvSpPr>
-          <p:cNvPr id="26" name="Text 24"/>
+          <p:cNvPr id="27" name="Text 25"/>
           <p:cNvSpPr/>
           <p:nvPr/>
         </p:nvSpPr>
@@ -10887,7 +10912,7 @@
               <a:buNone/>
             </a:pPr>
             <a:r>
-              <a:rPr lang="en-US" sz="1150" dirty="0">
+              <a:rPr lang="en-US" sz="1150" b="1" dirty="0">
                 <a:solidFill>
                   <a:srgbClr val="1F1F1F"/>
                 </a:solidFill>
@@ -10903,7 +10928,7 @@
       </p:sp>
       <p:sp>
         <p:nvSpPr>
-          <p:cNvPr id="27" name="Text 25"/>
+          <p:cNvPr id="28" name="Text 26"/>
           <p:cNvSpPr/>
           <p:nvPr/>
         </p:nvSpPr>
@@ -10942,7 +10967,7 @@
       </p:sp>
       <p:sp>
         <p:nvSpPr>
-          <p:cNvPr id="28" name="Text 26"/>
+          <p:cNvPr id="29" name="Text 27"/>
           <p:cNvSpPr/>
           <p:nvPr/>
         </p:nvSpPr>
@@ -10984,7 +11009,7 @@
       </p:sp>
       <p:sp>
         <p:nvSpPr>
-          <p:cNvPr id="29" name="Shape 27"/>
+          <p:cNvPr id="30" name="Shape 28"/>
           <p:cNvSpPr/>
           <p:nvPr/>
         </p:nvSpPr>
@@ -11009,7 +11034,7 @@
       </p:sp>
       <p:sp>
         <p:nvSpPr>
-          <p:cNvPr id="30" name="Shape 28"/>
+          <p:cNvPr id="31" name="Shape 29"/>
           <p:cNvSpPr/>
           <p:nvPr/>
         </p:nvSpPr>
@@ -11034,7 +11059,7 @@
       </p:sp>
       <p:sp>
         <p:nvSpPr>
-          <p:cNvPr id="31" name="Text 29"/>
+          <p:cNvPr id="32" name="Text 30"/>
           <p:cNvSpPr/>
           <p:nvPr/>
         </p:nvSpPr>
@@ -11073,7 +11098,7 @@
       </p:sp>
       <p:sp>
         <p:nvSpPr>
-          <p:cNvPr id="32" name="Text 30"/>
+          <p:cNvPr id="33" name="Text 31"/>
           <p:cNvSpPr/>
           <p:nvPr/>
         </p:nvSpPr>
@@ -11099,7 +11124,7 @@
               <a:buNone/>
             </a:pPr>
             <a:r>
-              <a:rPr lang="en-US" sz="1150" dirty="0">
+              <a:rPr lang="en-US" sz="1150" b="1" dirty="0">
                 <a:solidFill>
                   <a:srgbClr val="1F1F1F"/>
                 </a:solidFill>
@@ -11115,7 +11140,7 @@
       </p:sp>
       <p:sp>
         <p:nvSpPr>
-          <p:cNvPr id="33" name="Text 31"/>
+          <p:cNvPr id="34" name="Text 32"/>
           <p:cNvSpPr/>
           <p:nvPr/>
         </p:nvSpPr>
@@ -11154,7 +11179,7 @@
       </p:sp>
       <p:sp>
         <p:nvSpPr>
-          <p:cNvPr id="34" name="Text 32"/>
+          <p:cNvPr id="35" name="Text 33"/>
           <p:cNvSpPr/>
           <p:nvPr/>
         </p:nvSpPr>
@@ -11196,7 +11221,7 @@
       </p:sp>
       <p:sp>
         <p:nvSpPr>
-          <p:cNvPr id="35" name="Shape 33"/>
+          <p:cNvPr id="36" name="Shape 34"/>
           <p:cNvSpPr/>
           <p:nvPr/>
         </p:nvSpPr>
@@ -11221,7 +11246,7 @@
       </p:sp>
       <p:sp>
         <p:nvSpPr>
-          <p:cNvPr id="36" name="Text 34"/>
+          <p:cNvPr id="37" name="Text 35"/>
           <p:cNvSpPr/>
           <p:nvPr/>
         </p:nvSpPr>
@@ -11260,7 +11285,7 @@
       </p:sp>
       <p:sp>
         <p:nvSpPr>
-          <p:cNvPr id="37" name="Text 35"/>
+          <p:cNvPr id="38" name="Text 36"/>
           <p:cNvSpPr/>
           <p:nvPr/>
         </p:nvSpPr>
